--- a/teaching/cs513-autocps-fall-2026/slides/DynamicalSystems.pptx
+++ b/teaching/cs513-autocps-fall-2026/slides/DynamicalSystems.pptx
@@ -284,7 +284,7 @@
           <a:p>
             <a:fld id="{67A3F3DB-A97F-42A8-8666-E7552CF620C9}" type="datetimeFigureOut">
               <a:rPr lang="en-US" smtClean="0"/>
-              <a:t>9/8/2025</a:t>
+              <a:t>8/25/2026</a:t>
             </a:fld>
             <a:endParaRPr lang="en-US"/>
           </a:p>
@@ -482,7 +482,7 @@
           <a:p>
             <a:fld id="{67A3F3DB-A97F-42A8-8666-E7552CF620C9}" type="datetimeFigureOut">
               <a:rPr lang="en-US" smtClean="0"/>
-              <a:t>9/8/2025</a:t>
+              <a:t>8/25/2026</a:t>
             </a:fld>
             <a:endParaRPr lang="en-US"/>
           </a:p>
@@ -690,7 +690,7 @@
           <a:p>
             <a:fld id="{67A3F3DB-A97F-42A8-8666-E7552CF620C9}" type="datetimeFigureOut">
               <a:rPr lang="en-US" smtClean="0"/>
-              <a:t>9/8/2025</a:t>
+              <a:t>8/25/2026</a:t>
             </a:fld>
             <a:endParaRPr lang="en-US"/>
           </a:p>
@@ -793,7 +793,7 @@
             <a:spLocks noGrp="1"/>
           </p:cNvSpPr>
           <p:nvPr>
-            <p:ph idx="1"/>
+            <p:ph idx="1" hasCustomPrompt="1"/>
           </p:nvPr>
         </p:nvSpPr>
         <p:spPr>
@@ -815,7 +815,10 @@
               <a:buSzPct val="80000"/>
               <a:buFont typeface="Wingdings 3" panose="05040102010807070707" pitchFamily="18" charset="2"/>
               <a:buChar char=""/>
-              <a:defRPr/>
+              <a:defRPr>
+                <a:latin typeface="Cambria" panose="02040503050406030204" pitchFamily="18" charset="0"/>
+                <a:ea typeface="Cambria" panose="02040503050406030204" pitchFamily="18" charset="0"/>
+              </a:defRPr>
             </a:lvl1pPr>
             <a:lvl2pPr marL="685800" indent="-274320">
               <a:buClr>
@@ -824,7 +827,10 @@
               <a:buSzPct val="75000"/>
               <a:buFont typeface="Wingdings 3" panose="05040102010807070707" pitchFamily="18" charset="2"/>
               <a:buChar char=""/>
-              <a:defRPr/>
+              <a:defRPr>
+                <a:latin typeface="Cambria" panose="02040503050406030204" pitchFamily="18" charset="0"/>
+                <a:ea typeface="Cambria" panose="02040503050406030204" pitchFamily="18" charset="0"/>
+              </a:defRPr>
             </a:lvl2pPr>
             <a:lvl3pPr marL="1143000" indent="-228600">
               <a:buClr>
@@ -833,21 +839,30 @@
               <a:buSzPct val="70000"/>
               <a:buFont typeface="Wingdings 3" panose="05040102010807070707" pitchFamily="18" charset="2"/>
               <a:buChar char=""/>
-              <a:defRPr/>
+              <a:defRPr>
+                <a:latin typeface="Cambria" panose="02040503050406030204" pitchFamily="18" charset="0"/>
+                <a:ea typeface="Cambria" panose="02040503050406030204" pitchFamily="18" charset="0"/>
+              </a:defRPr>
             </a:lvl3pPr>
             <a:lvl4pPr>
               <a:buClr>
                 <a:srgbClr val="FF9B9B"/>
               </a:buClr>
               <a:buSzPct val="65000"/>
-              <a:defRPr/>
+              <a:defRPr>
+                <a:latin typeface="Cambria" panose="02040503050406030204" pitchFamily="18" charset="0"/>
+                <a:ea typeface="Cambria" panose="02040503050406030204" pitchFamily="18" charset="0"/>
+              </a:defRPr>
             </a:lvl4pPr>
             <a:lvl5pPr>
               <a:buClr>
                 <a:srgbClr val="FF9B9B"/>
               </a:buClr>
               <a:buSzPct val="60000"/>
-              <a:defRPr/>
+              <a:defRPr>
+                <a:latin typeface="Cambria" panose="02040503050406030204" pitchFamily="18" charset="0"/>
+                <a:ea typeface="Cambria" panose="02040503050406030204" pitchFamily="18" charset="0"/>
+              </a:defRPr>
             </a:lvl5pPr>
           </a:lstStyle>
           <a:p>
@@ -990,7 +1005,7 @@
           <p:nvPr userDrawn="1"/>
         </p:nvPicPr>
         <mc:AlternateContent xmlns:mc="http://schemas.openxmlformats.org/markup-compatibility/2006">
-          <mc:Choice xmlns="" xmlns:mv="urn:schemas-microsoft-com:mac:vml" xmlns:ma="http://schemas.microsoft.com/office/mac/drawingml/2008/main" Requires="ma">
+          <mc:Choice xmlns:ma="http://schemas.microsoft.com/office/mac/drawingml/2008/main" xmlns:mv="urn:schemas-microsoft-com:mac:vml" xmlns="" Requires="ma">
             <p:blipFill>
               <a:blip r:embed="rId3"/>
               <a:stretch>
@@ -1050,6 +1065,8 @@
                 <a:solidFill>
                   <a:srgbClr val="C00000"/>
                 </a:solidFill>
+                <a:latin typeface="Cambria" panose="02040503050406030204" pitchFamily="18" charset="0"/>
+                <a:ea typeface="Cambria" panose="02040503050406030204" pitchFamily="18" charset="0"/>
               </a:defRPr>
             </a:lvl1pPr>
           </a:lstStyle>
@@ -1104,6 +1121,138 @@
               <a:t>‹#›</a:t>
             </a:fld>
             <a:endParaRPr lang="en-US" dirty="0"/>
+          </a:p>
+        </p:txBody>
+      </p:sp>
+      <p:sp>
+        <p:nvSpPr>
+          <p:cNvPr id="2" name="Slide Number Placeholder 5">
+            <a:extLst>
+              <a:ext uri="{FF2B5EF4-FFF2-40B4-BE49-F238E27FC236}">
+                <a16:creationId xmlns:a16="http://schemas.microsoft.com/office/drawing/2014/main" id="{5D3E3B5D-4D13-0BA9-FDF2-D5287655871D}"/>
+              </a:ext>
+            </a:extLst>
+          </p:cNvPr>
+          <p:cNvSpPr txBox="1">
+            <a:spLocks/>
+          </p:cNvSpPr>
+          <p:nvPr userDrawn="1"/>
+        </p:nvSpPr>
+        <p:spPr>
+          <a:xfrm>
+            <a:off x="9205880" y="6198435"/>
+            <a:ext cx="2743200" cy="365125"/>
+          </a:xfrm>
+          <a:prstGeom prst="rect">
+            <a:avLst/>
+          </a:prstGeom>
+        </p:spPr>
+        <p:txBody>
+          <a:bodyPr vert="horz" lIns="91440" tIns="45720" rIns="91440" bIns="45720" rtlCol="0" anchor="ctr"/>
+          <a:lstStyle>
+            <a:defPPr>
+              <a:defRPr lang="en-US"/>
+            </a:defPPr>
+            <a:lvl1pPr marL="0" algn="r" defTabSz="914400" rtl="0" eaLnBrk="1" latinLnBrk="0" hangingPunct="1">
+              <a:defRPr sz="1200" kern="1200">
+                <a:solidFill>
+                  <a:schemeClr val="tx1">
+                    <a:tint val="75000"/>
+                  </a:schemeClr>
+                </a:solidFill>
+                <a:latin typeface="+mn-lt"/>
+                <a:ea typeface="+mn-ea"/>
+                <a:cs typeface="+mn-cs"/>
+              </a:defRPr>
+            </a:lvl1pPr>
+            <a:lvl2pPr marL="457200" algn="l" defTabSz="914400" rtl="0" eaLnBrk="1" latinLnBrk="0" hangingPunct="1">
+              <a:defRPr sz="1800" kern="1200">
+                <a:solidFill>
+                  <a:schemeClr val="tx1"/>
+                </a:solidFill>
+                <a:latin typeface="+mn-lt"/>
+                <a:ea typeface="+mn-ea"/>
+                <a:cs typeface="+mn-cs"/>
+              </a:defRPr>
+            </a:lvl2pPr>
+            <a:lvl3pPr marL="914400" algn="l" defTabSz="914400" rtl="0" eaLnBrk="1" latinLnBrk="0" hangingPunct="1">
+              <a:defRPr sz="1800" kern="1200">
+                <a:solidFill>
+                  <a:schemeClr val="tx1"/>
+                </a:solidFill>
+                <a:latin typeface="+mn-lt"/>
+                <a:ea typeface="+mn-ea"/>
+                <a:cs typeface="+mn-cs"/>
+              </a:defRPr>
+            </a:lvl3pPr>
+            <a:lvl4pPr marL="1371600" algn="l" defTabSz="914400" rtl="0" eaLnBrk="1" latinLnBrk="0" hangingPunct="1">
+              <a:defRPr sz="1800" kern="1200">
+                <a:solidFill>
+                  <a:schemeClr val="tx1"/>
+                </a:solidFill>
+                <a:latin typeface="+mn-lt"/>
+                <a:ea typeface="+mn-ea"/>
+                <a:cs typeface="+mn-cs"/>
+              </a:defRPr>
+            </a:lvl4pPr>
+            <a:lvl5pPr marL="1828800" algn="l" defTabSz="914400" rtl="0" eaLnBrk="1" latinLnBrk="0" hangingPunct="1">
+              <a:defRPr sz="1800" kern="1200">
+                <a:solidFill>
+                  <a:schemeClr val="tx1"/>
+                </a:solidFill>
+                <a:latin typeface="+mn-lt"/>
+                <a:ea typeface="+mn-ea"/>
+                <a:cs typeface="+mn-cs"/>
+              </a:defRPr>
+            </a:lvl5pPr>
+            <a:lvl6pPr marL="2286000" algn="l" defTabSz="914400" rtl="0" eaLnBrk="1" latinLnBrk="0" hangingPunct="1">
+              <a:defRPr sz="1800" kern="1200">
+                <a:solidFill>
+                  <a:schemeClr val="tx1"/>
+                </a:solidFill>
+                <a:latin typeface="+mn-lt"/>
+                <a:ea typeface="+mn-ea"/>
+                <a:cs typeface="+mn-cs"/>
+              </a:defRPr>
+            </a:lvl6pPr>
+            <a:lvl7pPr marL="2743200" algn="l" defTabSz="914400" rtl="0" eaLnBrk="1" latinLnBrk="0" hangingPunct="1">
+              <a:defRPr sz="1800" kern="1200">
+                <a:solidFill>
+                  <a:schemeClr val="tx1"/>
+                </a:solidFill>
+                <a:latin typeface="+mn-lt"/>
+                <a:ea typeface="+mn-ea"/>
+                <a:cs typeface="+mn-cs"/>
+              </a:defRPr>
+            </a:lvl7pPr>
+            <a:lvl8pPr marL="3200400" algn="l" defTabSz="914400" rtl="0" eaLnBrk="1" latinLnBrk="0" hangingPunct="1">
+              <a:defRPr sz="1800" kern="1200">
+                <a:solidFill>
+                  <a:schemeClr val="tx1"/>
+                </a:solidFill>
+                <a:latin typeface="+mn-lt"/>
+                <a:ea typeface="+mn-ea"/>
+                <a:cs typeface="+mn-cs"/>
+              </a:defRPr>
+            </a:lvl8pPr>
+            <a:lvl9pPr marL="3657600" algn="l" defTabSz="914400" rtl="0" eaLnBrk="1" latinLnBrk="0" hangingPunct="1">
+              <a:defRPr sz="1800" kern="1200">
+                <a:solidFill>
+                  <a:schemeClr val="tx1"/>
+                </a:solidFill>
+                <a:latin typeface="+mn-lt"/>
+                <a:ea typeface="+mn-ea"/>
+                <a:cs typeface="+mn-cs"/>
+              </a:defRPr>
+            </a:lvl9pPr>
+          </a:lstStyle>
+          <a:p>
+            <a:fld id="{35A63A97-DB16-4BDE-9275-89B0F63D25C4}" type="slidenum">
+              <a:rPr lang="en-US" smtClean="0"/>
+              <a:pPr/>
+              <a:t>‹#›</a:t>
+            </a:fld>
+            <a:endParaRPr lang="en-US"/>
           </a:p>
         </p:txBody>
       </p:sp>
@@ -1245,7 +1394,7 @@
           <a:p>
             <a:fld id="{67A3F3DB-A97F-42A8-8666-E7552CF620C9}" type="datetimeFigureOut">
               <a:rPr lang="en-US" smtClean="0"/>
-              <a:t>9/8/2025</a:t>
+              <a:t>8/25/2026</a:t>
             </a:fld>
             <a:endParaRPr lang="en-US"/>
           </a:p>
@@ -1520,7 +1669,7 @@
           <a:p>
             <a:fld id="{67A3F3DB-A97F-42A8-8666-E7552CF620C9}" type="datetimeFigureOut">
               <a:rPr lang="en-US" smtClean="0"/>
-              <a:t>9/8/2025</a:t>
+              <a:t>8/25/2026</a:t>
             </a:fld>
             <a:endParaRPr lang="en-US"/>
           </a:p>
@@ -1785,7 +1934,7 @@
           <a:p>
             <a:fld id="{67A3F3DB-A97F-42A8-8666-E7552CF620C9}" type="datetimeFigureOut">
               <a:rPr lang="en-US" smtClean="0"/>
-              <a:t>9/8/2025</a:t>
+              <a:t>8/25/2026</a:t>
             </a:fld>
             <a:endParaRPr lang="en-US"/>
           </a:p>
@@ -2197,7 +2346,7 @@
           <a:p>
             <a:fld id="{67A3F3DB-A97F-42A8-8666-E7552CF620C9}" type="datetimeFigureOut">
               <a:rPr lang="en-US" smtClean="0"/>
-              <a:t>9/8/2025</a:t>
+              <a:t>8/25/2026</a:t>
             </a:fld>
             <a:endParaRPr lang="en-US"/>
           </a:p>
@@ -2338,7 +2487,7 @@
           <a:p>
             <a:fld id="{67A3F3DB-A97F-42A8-8666-E7552CF620C9}" type="datetimeFigureOut">
               <a:rPr lang="en-US" smtClean="0"/>
-              <a:t>9/8/2025</a:t>
+              <a:t>8/25/2026</a:t>
             </a:fld>
             <a:endParaRPr lang="en-US"/>
           </a:p>
@@ -2451,7 +2600,7 @@
           <a:p>
             <a:fld id="{67A3F3DB-A97F-42A8-8666-E7552CF620C9}" type="datetimeFigureOut">
               <a:rPr lang="en-US" smtClean="0"/>
-              <a:t>9/8/2025</a:t>
+              <a:t>8/25/2026</a:t>
             </a:fld>
             <a:endParaRPr lang="en-US"/>
           </a:p>
@@ -2762,7 +2911,7 @@
           <a:p>
             <a:fld id="{67A3F3DB-A97F-42A8-8666-E7552CF620C9}" type="datetimeFigureOut">
               <a:rPr lang="en-US" smtClean="0"/>
-              <a:t>9/8/2025</a:t>
+              <a:t>8/25/2026</a:t>
             </a:fld>
             <a:endParaRPr lang="en-US"/>
           </a:p>
@@ -3050,7 +3199,7 @@
           <a:p>
             <a:fld id="{67A3F3DB-A97F-42A8-8666-E7552CF620C9}" type="datetimeFigureOut">
               <a:rPr lang="en-US" smtClean="0"/>
-              <a:t>9/8/2025</a:t>
+              <a:t>8/25/2026</a:t>
             </a:fld>
             <a:endParaRPr lang="en-US"/>
           </a:p>
@@ -3291,7 +3440,7 @@
           <a:p>
             <a:fld id="{67A3F3DB-A97F-42A8-8666-E7552CF620C9}" type="datetimeFigureOut">
               <a:rPr lang="en-US" smtClean="0"/>
-              <a:t>9/8/2025</a:t>
+              <a:t>8/25/2026</a:t>
             </a:fld>
             <a:endParaRPr lang="en-US"/>
           </a:p>
@@ -3736,17 +3885,29 @@
           <a:lstStyle/>
           <a:p>
             <a:r>
-              <a:rPr lang="en-US" dirty="0"/>
+              <a:rPr lang="en-US" sz="4800" dirty="0">
+                <a:latin typeface="Cambria" panose="02040503050406030204" pitchFamily="18" charset="0"/>
+                <a:ea typeface="Cambria" panose="02040503050406030204" pitchFamily="18" charset="0"/>
+              </a:rPr>
               <a:t>Autonomous Cyber-Physical Systems:</a:t>
             </a:r>
             <a:br>
-              <a:rPr lang="en-US" dirty="0"/>
+              <a:rPr lang="en-US" sz="4800" dirty="0">
+                <a:latin typeface="Cambria" panose="02040503050406030204" pitchFamily="18" charset="0"/>
+                <a:ea typeface="Cambria" panose="02040503050406030204" pitchFamily="18" charset="0"/>
+              </a:rPr>
             </a:br>
             <a:r>
-              <a:rPr lang="en-US" sz="4000" dirty="0"/>
+              <a:rPr lang="en-US" sz="3200" dirty="0">
+                <a:latin typeface="Cambria" panose="02040503050406030204" pitchFamily="18" charset="0"/>
+                <a:ea typeface="Cambria" panose="02040503050406030204" pitchFamily="18" charset="0"/>
+              </a:rPr>
               <a:t>Dynamical System Models</a:t>
             </a:r>
-            <a:endParaRPr lang="en-US" dirty="0"/>
+            <a:endParaRPr lang="en-US" sz="4800" dirty="0">
+              <a:latin typeface="Cambria" panose="02040503050406030204" pitchFamily="18" charset="0"/>
+              <a:ea typeface="Cambria" panose="02040503050406030204" pitchFamily="18" charset="0"/>
+            </a:endParaRPr>
           </a:p>
         </p:txBody>
       </p:sp>
@@ -3774,13 +3935,19 @@
           <a:lstStyle/>
           <a:p>
             <a:r>
-              <a:rPr lang="en-US" dirty="0"/>
-              <a:t>Fall 2025. CS 513.</a:t>
+              <a:rPr lang="en-US" sz="1800" dirty="0">
+                <a:latin typeface="Cambria" panose="02040503050406030204" pitchFamily="18" charset="0"/>
+                <a:ea typeface="Cambria" panose="02040503050406030204" pitchFamily="18" charset="0"/>
+              </a:rPr>
+              <a:t>Fall 2026. CS 513.</a:t>
             </a:r>
           </a:p>
           <a:p>
             <a:r>
-              <a:rPr lang="en-US" dirty="0"/>
+              <a:rPr lang="en-US" sz="1800" dirty="0">
+                <a:latin typeface="Cambria" panose="02040503050406030204" pitchFamily="18" charset="0"/>
+                <a:ea typeface="Cambria" panose="02040503050406030204" pitchFamily="18" charset="0"/>
+              </a:rPr>
               <a:t>Instructor: Jyo Deshmukh</a:t>
             </a:r>
           </a:p>
@@ -9917,8 +10084,8 @@
           <a:chExt cx="0" cy="0"/>
         </a:xfrm>
       </p:grpSpPr>
-      <mc:AlternateContent xmlns:mc="http://schemas.openxmlformats.org/markup-compatibility/2006" xmlns:a14="http://schemas.microsoft.com/office/drawing/2010/main">
-        <mc:Choice Requires="a14">
+      <mc:AlternateContent xmlns:mc="http://schemas.openxmlformats.org/markup-compatibility/2006">
+        <mc:Choice xmlns:a14="http://schemas.microsoft.com/office/drawing/2010/main" Requires="a14">
           <p:sp>
             <p:nvSpPr>
               <p:cNvPr id="2" name="Content Placeholder 1">
@@ -9938,7 +10105,7 @@
             <p:spPr/>
             <p:txBody>
               <a:bodyPr>
-                <a:normAutofit lnSpcReduction="10000"/>
+                <a:normAutofit fontScale="92500"/>
               </a:bodyPr>
               <a:lstStyle/>
               <a:p>
@@ -10651,7 +10818,7 @@
             </p:txBody>
           </p:sp>
         </mc:Choice>
-        <mc:Fallback xmlns="">
+        <mc:Fallback>
           <p:sp>
             <p:nvSpPr>
               <p:cNvPr id="2" name="Content Placeholder 1">
@@ -10672,7 +10839,7 @@
               <a:blipFill>
                 <a:blip r:embed="rId2"/>
                 <a:stretch>
-                  <a:fillRect l="-625" t="-2835"/>
+                  <a:fillRect l="-521" t="-2062"/>
                 </a:stretch>
               </a:blipFill>
             </p:spPr>
@@ -16342,7 +16509,7 @@
         </p:spPr>
         <p:txBody>
           <a:bodyPr>
-            <a:normAutofit/>
+            <a:normAutofit fontScale="92500"/>
           </a:bodyPr>
           <a:lstStyle/>
           <a:p>
